--- a/Making_Stack_Comments_Checkable_7.pptx
+++ b/Making_Stack_Comments_Checkable_7.pptx
@@ -2204,7 +2204,7 @@
                 <a:ea typeface="JetBrains Mono" pitchFamily="34" charset="-122"/>
                 <a:cs typeface="JetBrains Mono" pitchFamily="34" charset="-120"/>
               </a:rPr>
-              <a:t>( a-addr[1] -- X[2] X )</a:t>
+              <a:t>( a-addr -- X X )</a:t>
             </a:r>
             <a:endParaRPr lang="en-US" sz="2700" dirty="0"/>
           </a:p>
@@ -7282,7 +7282,7 @@
                 <a:ea typeface="Inter" pitchFamily="34" charset="-122"/>
                 <a:cs typeface="Inter" pitchFamily="34" charset="-120"/>
               </a:rPr>
-              <a:t>Both paths leave one number; they differ only in whether they negate or increment it.</a:t>
+              <a:t>Inputs keep the common subtype; outputs keep the common supertype. Here both paths guarantee n.</a:t>
             </a:r>
             <a:endParaRPr lang="en-US" sz="2400" dirty="0"/>
           </a:p>
